--- a/examples/helloworld.pptx
+++ b/examples/helloworld.pptx
@@ -6040,7 +6040,7 @@
             </a:pPr>
             <a:r>
               <a:rPr/>
-              <a:t>这是副标题</a:t>
+              <a:t>SunQuarTeX Examples</a:t>
             </a:r>
             <a:br/>
             <a:br/>
